--- a/docs/Car Market Trends Analysis - Presentation.pptx
+++ b/docs/Car Market Trends Analysis - Presentation.pptx
@@ -260,7 +260,7 @@
           <a:p>
             <a:fld id="{EF1077DB-935E-4A0A-947A-D283B9F9F452}" type="datetimeFigureOut">
               <a:rPr lang="en-US" smtClean="0"/>
-              <a:t>8/29/2026</a:t>
+              <a:t>8/31/2026</a:t>
             </a:fld>
             <a:endParaRPr lang="en-US" dirty="0"/>
           </a:p>
@@ -437,7 +437,7 @@
           <a:p>
             <a:fld id="{2D9EC30E-1A71-4188-9BE7-E2A64929A436}" type="datetimeFigureOut">
               <a:rPr lang="en-US" noProof="0" smtClean="0"/>
-              <a:t>8/29/2026</a:t>
+              <a:t>8/31/2026</a:t>
             </a:fld>
             <a:endParaRPr lang="en-US" noProof="0" dirty="0"/>
           </a:p>
@@ -1534,7 +1534,7 @@
             <a:fld id="{B61BEF0D-F0BB-DE4B-95CE-6DB70DBA9567}" type="datetimeFigureOut">
               <a:rPr lang="en-US" smtClean="0"/>
               <a:pPr/>
-              <a:t>8/29/2026</a:t>
+              <a:t>8/31/2026</a:t>
             </a:fld>
             <a:endParaRPr lang="en-US" dirty="0"/>
           </a:p>
@@ -1788,7 +1788,7 @@
             <a:fld id="{B61BEF0D-F0BB-DE4B-95CE-6DB70DBA9567}" type="datetimeFigureOut">
               <a:rPr lang="en-US" smtClean="0"/>
               <a:pPr/>
-              <a:t>8/29/2026</a:t>
+              <a:t>8/31/2026</a:t>
             </a:fld>
             <a:endParaRPr lang="en-US" dirty="0"/>
           </a:p>
@@ -2105,7 +2105,7 @@
             <a:fld id="{B61BEF0D-F0BB-DE4B-95CE-6DB70DBA9567}" type="datetimeFigureOut">
               <a:rPr lang="en-US" smtClean="0"/>
               <a:pPr/>
-              <a:t>8/29/2026</a:t>
+              <a:t>8/31/2026</a:t>
             </a:fld>
             <a:endParaRPr lang="en-US" dirty="0"/>
           </a:p>
@@ -2441,7 +2441,7 @@
             <a:fld id="{B61BEF0D-F0BB-DE4B-95CE-6DB70DBA9567}" type="datetimeFigureOut">
               <a:rPr lang="en-US" smtClean="0"/>
               <a:pPr/>
-              <a:t>8/29/2026</a:t>
+              <a:t>8/31/2026</a:t>
             </a:fld>
             <a:endParaRPr lang="en-US" dirty="0"/>
           </a:p>
@@ -2758,7 +2758,7 @@
             <a:fld id="{B61BEF0D-F0BB-DE4B-95CE-6DB70DBA9567}" type="datetimeFigureOut">
               <a:rPr lang="en-US" smtClean="0"/>
               <a:pPr/>
-              <a:t>8/29/2026</a:t>
+              <a:t>8/31/2026</a:t>
             </a:fld>
             <a:endParaRPr lang="en-US" dirty="0"/>
           </a:p>
@@ -3154,7 +3154,7 @@
             <a:fld id="{B61BEF0D-F0BB-DE4B-95CE-6DB70DBA9567}" type="datetimeFigureOut">
               <a:rPr lang="en-US" smtClean="0"/>
               <a:pPr/>
-              <a:t>8/29/2026</a:t>
+              <a:t>8/31/2026</a:t>
             </a:fld>
             <a:endParaRPr lang="en-US" dirty="0"/>
           </a:p>
@@ -3326,7 +3326,7 @@
           <a:p>
             <a:fld id="{55C6B4A9-1611-4792-9094-5F34BCA07E0B}" type="datetimeFigureOut">
               <a:rPr lang="en-US" smtClean="0"/>
-              <a:t>8/29/2026</a:t>
+              <a:t>8/31/2026</a:t>
             </a:fld>
             <a:endParaRPr lang="en-US" dirty="0"/>
           </a:p>
@@ -3508,7 +3508,7 @@
             <a:fld id="{B61BEF0D-F0BB-DE4B-95CE-6DB70DBA9567}" type="datetimeFigureOut">
               <a:rPr lang="en-US" smtClean="0"/>
               <a:pPr/>
-              <a:t>8/29/2026</a:t>
+              <a:t>8/31/2026</a:t>
             </a:fld>
             <a:endParaRPr lang="en-US" dirty="0"/>
           </a:p>
@@ -5237,7 +5237,7 @@
             <a:fld id="{B61BEF0D-F0BB-DE4B-95CE-6DB70DBA9567}" type="datetimeFigureOut">
               <a:rPr lang="en-US" smtClean="0"/>
               <a:pPr/>
-              <a:t>8/29/2026</a:t>
+              <a:t>8/31/2026</a:t>
             </a:fld>
             <a:endParaRPr lang="en-US" dirty="0"/>
           </a:p>
@@ -6972,7 +6972,7 @@
             <a:fld id="{B61BEF0D-F0BB-DE4B-95CE-6DB70DBA9567}" type="datetimeFigureOut">
               <a:rPr lang="en-US" smtClean="0"/>
               <a:pPr/>
-              <a:t>8/29/2026</a:t>
+              <a:t>8/31/2026</a:t>
             </a:fld>
             <a:endParaRPr lang="en-US" dirty="0"/>
           </a:p>
@@ -7206,7 +7206,7 @@
           <a:p>
             <a:fld id="{EB712588-04B1-427B-82EE-E8DB90309F08}" type="datetimeFigureOut">
               <a:rPr lang="en-US" smtClean="0"/>
-              <a:t>8/29/2026</a:t>
+              <a:t>8/31/2026</a:t>
             </a:fld>
             <a:endParaRPr lang="en-US" dirty="0"/>
           </a:p>
@@ -7582,7 +7582,7 @@
             <a:fld id="{B61BEF0D-F0BB-DE4B-95CE-6DB70DBA9567}" type="datetimeFigureOut">
               <a:rPr lang="en-US" smtClean="0"/>
               <a:pPr/>
-              <a:t>8/29/2026</a:t>
+              <a:t>8/31/2026</a:t>
             </a:fld>
             <a:endParaRPr lang="en-US" dirty="0"/>
           </a:p>
@@ -7708,7 +7708,7 @@
             <a:fld id="{B61BEF0D-F0BB-DE4B-95CE-6DB70DBA9567}" type="datetimeFigureOut">
               <a:rPr lang="en-US" smtClean="0"/>
               <a:pPr/>
-              <a:t>8/29/2026</a:t>
+              <a:t>8/31/2026</a:t>
             </a:fld>
             <a:endParaRPr lang="en-US" dirty="0"/>
           </a:p>
@@ -7806,7 +7806,7 @@
             <a:fld id="{B61BEF0D-F0BB-DE4B-95CE-6DB70DBA9567}" type="datetimeFigureOut">
               <a:rPr lang="en-US" smtClean="0"/>
               <a:pPr/>
-              <a:t>8/29/2026</a:t>
+              <a:t>8/31/2026</a:t>
             </a:fld>
             <a:endParaRPr lang="en-US" dirty="0"/>
           </a:p>
@@ -8063,7 +8063,7 @@
           <a:p>
             <a:fld id="{42A54C80-263E-416B-A8E0-580EDEADCBDC}" type="datetimeFigureOut">
               <a:rPr lang="en-US" smtClean="0"/>
-              <a:t>8/29/2026</a:t>
+              <a:t>8/31/2026</a:t>
             </a:fld>
             <a:endParaRPr lang="en-US" dirty="0"/>
           </a:p>
@@ -8371,7 +8371,7 @@
             <a:fld id="{B61BEF0D-F0BB-DE4B-95CE-6DB70DBA9567}" type="datetimeFigureOut">
               <a:rPr lang="en-US" smtClean="0"/>
               <a:pPr/>
-              <a:t>8/29/2026</a:t>
+              <a:t>8/31/2026</a:t>
             </a:fld>
             <a:endParaRPr lang="en-US" dirty="0"/>
           </a:p>
@@ -9075,7 +9075,7 @@
             <a:fld id="{B61BEF0D-F0BB-DE4B-95CE-6DB70DBA9567}" type="datetimeFigureOut">
               <a:rPr lang="en-US" smtClean="0"/>
               <a:pPr/>
-              <a:t>8/29/2026</a:t>
+              <a:t>8/31/2026</a:t>
             </a:fld>
             <a:endParaRPr lang="en-US" dirty="0"/>
           </a:p>
@@ -9286,7 +9286,7 @@
                 </a:solidFill>
               </a:rPr>
               <a:pPr/>
-              <a:t>8/29/2026</a:t>
+              <a:t>8/31/2026</a:t>
             </a:fld>
             <a:endParaRPr lang="en-US" sz="1100" dirty="0">
               <a:solidFill>
@@ -10075,16 +10075,7 @@
                 </a:solidFill>
                 <a:latin typeface="Arial Black" panose="020B0A04020102020204" pitchFamily="34" charset="0"/>
               </a:rPr>
-              <a:t> </a:t>
-            </a:r>
-            <a:r>
-              <a:rPr lang="en-US" sz="1100" dirty="0" smtClean="0">
-                <a:solidFill>
-                  <a:schemeClr val="tx1"/>
-                </a:solidFill>
-                <a:latin typeface="Arial Black" panose="020B0A04020102020204" pitchFamily="34" charset="0"/>
-              </a:rPr>
-              <a:t>Sanjay Monde </a:t>
+              <a:t> Sanjay Monde </a:t>
             </a:r>
           </a:p>
           <a:p>
@@ -13995,38 +13986,6 @@
       </p:sp>
       <p:sp>
         <p:nvSpPr>
-          <p:cNvPr id="31" name="Text Placeholder 30">
-            <a:extLst>
-              <a:ext uri="{FF2B5EF4-FFF2-40B4-BE49-F238E27FC236}">
-                <a16:creationId xmlns="" xmlns:a16="http://schemas.microsoft.com/office/drawing/2014/main" id="{97AB1F14-3A1E-4057-A473-9975BA59F012}"/>
-              </a:ext>
-            </a:extLst>
-          </p:cNvPr>
-          <p:cNvSpPr>
-            <a:spLocks noGrp="1"/>
-          </p:cNvSpPr>
-          <p:nvPr>
-            <p:ph type="body" sz="quarter" idx="13"/>
-          </p:nvPr>
-        </p:nvSpPr>
-        <p:spPr>
-          <a:xfrm>
-            <a:off x="3727865" y="4641925"/>
-            <a:ext cx="2139695" cy="1108635"/>
-          </a:xfrm>
-        </p:spPr>
-        <p:txBody>
-          <a:bodyPr>
-            <a:normAutofit/>
-          </a:bodyPr>
-          <a:lstStyle/>
-          <a:p>
-            <a:endParaRPr lang="en-US" dirty="0"/>
-          </a:p>
-        </p:txBody>
-      </p:sp>
-      <p:sp>
-        <p:nvSpPr>
           <p:cNvPr id="17" name="Text Placeholder 28">
             <a:extLst>
               <a:ext uri="{FF2B5EF4-FFF2-40B4-BE49-F238E27FC236}">
@@ -15368,7 +15327,9 @@
             <a:r>
               <a:rPr lang="en-US" dirty="0" smtClean="0">
                 <a:solidFill>
-                  <a:srgbClr val="00B0F0"/>
+                  <a:schemeClr val="accent2">
+                    <a:lumMod val="75000"/>
+                  </a:schemeClr>
                 </a:solidFill>
                 <a:hlinkClick r:id="rId3"/>
               </a:rPr>
@@ -15376,7 +15337,9 @@
             </a:r>
             <a:endParaRPr lang="en-IN" dirty="0">
               <a:solidFill>
-                <a:srgbClr val="00B0F0"/>
+                <a:schemeClr val="accent2">
+                  <a:lumMod val="75000"/>
+                </a:schemeClr>
               </a:solidFill>
             </a:endParaRPr>
           </a:p>
@@ -15611,11 +15574,7 @@
                                           </p:stCondLst>
                                         </p:cTn>
                                         <p:tgtEl>
-                                          <p:spTgt spid="31">
-                                            <p:txEl>
-                                              <p:pRg st="0" end="0"/>
-                                            </p:txEl>
-                                          </p:spTgt>
+                                          <p:spTgt spid="20"/>
                                         </p:tgtEl>
                                         <p:attrNameLst>
                                           <p:attrName>style.visibility</p:attrName>
@@ -15629,11 +15588,7 @@
                                       <p:cBhvr additive="base">
                                         <p:cTn id="20" dur="500"/>
                                         <p:tgtEl>
-                                          <p:spTgt spid="31">
-                                            <p:txEl>
-                                              <p:pRg st="0" end="0"/>
-                                            </p:txEl>
-                                          </p:spTgt>
+                                          <p:spTgt spid="20"/>
                                         </p:tgtEl>
                                         <p:attrNameLst>
                                           <p:attrName>ppt_y</p:attrName>
@@ -15656,11 +15611,7 @@
                                       <p:cBhvr>
                                         <p:cTn id="21" dur="500"/>
                                         <p:tgtEl>
-                                          <p:spTgt spid="31">
-                                            <p:txEl>
-                                              <p:pRg st="0" end="0"/>
-                                            </p:txEl>
-                                          </p:spTgt>
+                                          <p:spTgt spid="20"/>
                                         </p:tgtEl>
                                       </p:cBhvr>
                                     </p:animEffect>
@@ -15704,7 +15655,7 @@
                                           </p:stCondLst>
                                         </p:cTn>
                                         <p:tgtEl>
-                                          <p:spTgt spid="20"/>
+                                          <p:spTgt spid="30"/>
                                         </p:tgtEl>
                                         <p:attrNameLst>
                                           <p:attrName>style.visibility</p:attrName>
@@ -15718,7 +15669,7 @@
                                       <p:cBhvr additive="base">
                                         <p:cTn id="26" dur="500"/>
                                         <p:tgtEl>
-                                          <p:spTgt spid="20"/>
+                                          <p:spTgt spid="30"/>
                                         </p:tgtEl>
                                         <p:attrNameLst>
                                           <p:attrName>ppt_y</p:attrName>
@@ -15741,7 +15692,7 @@
                                       <p:cBhvr>
                                         <p:cTn id="27" dur="500"/>
                                         <p:tgtEl>
-                                          <p:spTgt spid="20"/>
+                                          <p:spTgt spid="30"/>
                                         </p:tgtEl>
                                       </p:cBhvr>
                                     </p:animEffect>
@@ -15785,7 +15736,7 @@
                                           </p:stCondLst>
                                         </p:cTn>
                                         <p:tgtEl>
-                                          <p:spTgt spid="30"/>
+                                          <p:spTgt spid="23"/>
                                         </p:tgtEl>
                                         <p:attrNameLst>
                                           <p:attrName>style.visibility</p:attrName>
@@ -15799,7 +15750,7 @@
                                       <p:cBhvr additive="base">
                                         <p:cTn id="32" dur="500"/>
                                         <p:tgtEl>
-                                          <p:spTgt spid="30"/>
+                                          <p:spTgt spid="23"/>
                                         </p:tgtEl>
                                         <p:attrNameLst>
                                           <p:attrName>ppt_y</p:attrName>
@@ -15822,7 +15773,7 @@
                                       <p:cBhvr>
                                         <p:cTn id="33" dur="500"/>
                                         <p:tgtEl>
-                                          <p:spTgt spid="30"/>
+                                          <p:spTgt spid="23"/>
                                         </p:tgtEl>
                                       </p:cBhvr>
                                     </p:animEffect>
@@ -15848,95 +15799,14 @@
                             </p:stCondLst>
                             <p:childTnLst>
                               <p:par>
-                                <p:cTn id="36" presetID="12" presetClass="entr" presetSubtype="4" fill="hold" grpId="0" nodeType="clickEffect" nodePh="1">
-                                  <p:stCondLst>
-                                    <p:cond delay="0"/>
-                                  </p:stCondLst>
-                                  <p:endCondLst>
-                                    <p:cond evt="begin" delay="0">
-                                      <p:tn val="36"/>
-                                    </p:cond>
-                                  </p:endCondLst>
-                                  <p:childTnLst>
-                                    <p:set>
-                                      <p:cBhvr>
-                                        <p:cTn id="37" dur="1" fill="hold">
-                                          <p:stCondLst>
-                                            <p:cond delay="0"/>
-                                          </p:stCondLst>
-                                        </p:cTn>
-                                        <p:tgtEl>
-                                          <p:spTgt spid="23"/>
-                                        </p:tgtEl>
-                                        <p:attrNameLst>
-                                          <p:attrName>style.visibility</p:attrName>
-                                        </p:attrNameLst>
-                                      </p:cBhvr>
-                                      <p:to>
-                                        <p:strVal val="visible"/>
-                                      </p:to>
-                                    </p:set>
-                                    <p:anim calcmode="lin" valueType="num">
-                                      <p:cBhvr additive="base">
-                                        <p:cTn id="38" dur="500"/>
-                                        <p:tgtEl>
-                                          <p:spTgt spid="23"/>
-                                        </p:tgtEl>
-                                        <p:attrNameLst>
-                                          <p:attrName>ppt_y</p:attrName>
-                                        </p:attrNameLst>
-                                      </p:cBhvr>
-                                      <p:tavLst>
-                                        <p:tav tm="0">
-                                          <p:val>
-                                            <p:strVal val="#ppt_y+#ppt_h*1.125000"/>
-                                          </p:val>
-                                        </p:tav>
-                                        <p:tav tm="100000">
-                                          <p:val>
-                                            <p:strVal val="#ppt_y"/>
-                                          </p:val>
-                                        </p:tav>
-                                      </p:tavLst>
-                                    </p:anim>
-                                    <p:animEffect transition="in" filter="wipe(up)">
-                                      <p:cBhvr>
-                                        <p:cTn id="39" dur="500"/>
-                                        <p:tgtEl>
-                                          <p:spTgt spid="23"/>
-                                        </p:tgtEl>
-                                      </p:cBhvr>
-                                    </p:animEffect>
-                                  </p:childTnLst>
-                                </p:cTn>
-                              </p:par>
-                            </p:childTnLst>
-                          </p:cTn>
-                        </p:par>
-                      </p:childTnLst>
-                    </p:cTn>
-                  </p:par>
-                  <p:par>
-                    <p:cTn id="40" fill="hold">
-                      <p:stCondLst>
-                        <p:cond delay="indefinite"/>
-                      </p:stCondLst>
-                      <p:childTnLst>
-                        <p:par>
-                          <p:cTn id="41" fill="hold">
-                            <p:stCondLst>
-                              <p:cond delay="0"/>
-                            </p:stCondLst>
-                            <p:childTnLst>
-                              <p:par>
-                                <p:cTn id="42" presetID="12" presetClass="entr" presetSubtype="4" fill="hold" grpId="0" nodeType="clickEffect">
+                                <p:cTn id="36" presetID="12" presetClass="entr" presetSubtype="4" fill="hold" grpId="0" nodeType="clickEffect">
                                   <p:stCondLst>
                                     <p:cond delay="0"/>
                                   </p:stCondLst>
                                   <p:childTnLst>
                                     <p:set>
                                       <p:cBhvr>
-                                        <p:cTn id="43" dur="1" fill="hold">
+                                        <p:cTn id="37" dur="1" fill="hold">
                                           <p:stCondLst>
                                             <p:cond delay="0"/>
                                           </p:stCondLst>
@@ -15954,7 +15824,7 @@
                                     </p:set>
                                     <p:anim calcmode="lin" valueType="num">
                                       <p:cBhvr additive="base">
-                                        <p:cTn id="44" dur="500"/>
+                                        <p:cTn id="38" dur="500"/>
                                         <p:tgtEl>
                                           <p:spTgt spid="32"/>
                                         </p:tgtEl>
@@ -15977,7 +15847,7 @@
                                     </p:anim>
                                     <p:animEffect transition="in" filter="wipe(up)">
                                       <p:cBhvr>
-                                        <p:cTn id="45" dur="500"/>
+                                        <p:cTn id="39" dur="500"/>
                                         <p:tgtEl>
                                           <p:spTgt spid="32"/>
                                         </p:tgtEl>
@@ -16015,7 +15885,6 @@
     </p:tnLst>
     <p:bldLst>
       <p:bldP spid="3" grpId="0"/>
-      <p:bldP spid="31" grpId="0" build="p"/>
       <p:bldP spid="17" grpId="0"/>
       <p:bldP spid="20" grpId="0"/>
       <p:bldP spid="23" grpId="0"/>
@@ -17574,8 +17443,8 @@
         </p:nvSpPr>
         <p:spPr bwMode="auto">
           <a:xfrm>
-            <a:off x="721359" y="1876284"/>
-            <a:ext cx="6732498" cy="4247317"/>
+            <a:off x="721359" y="2024377"/>
+            <a:ext cx="8534784" cy="4247317"/>
           </a:xfrm>
           <a:prstGeom prst="rect">
             <a:avLst/>
@@ -17805,7 +17674,29 @@
                 <a:effectLst/>
                 <a:latin typeface="Arial" panose="020B0604020202020204" pitchFamily="34" charset="0"/>
               </a:rPr>
-              <a:t>Online marketplaces (e.g. </a:t>
+              <a:t>Online marketplaces (</a:t>
+            </a:r>
+            <a:r>
+              <a:rPr kumimoji="0" lang="en-US" altLang="en-US" sz="1800" b="1" i="0" u="none" strike="noStrike" cap="none" normalizeH="0" baseline="0" dirty="0" err="1" smtClean="0">
+                <a:ln>
+                  <a:noFill/>
+                </a:ln>
+                <a:solidFill>
+                  <a:schemeClr val="tx1"/>
+                </a:solidFill>
+                <a:effectLst/>
+                <a:latin typeface="Arial" panose="020B0604020202020204" pitchFamily="34" charset="0"/>
+              </a:rPr>
+              <a:t>e.g</a:t>
+            </a:r>
+            <a:r>
+              <a:rPr lang="en-US" altLang="en-US" sz="1800" b="1" dirty="0" smtClean="0">
+                <a:solidFill>
+                  <a:schemeClr val="tx1"/>
+                </a:solidFill>
+                <a:latin typeface="Arial" panose="020B0604020202020204" pitchFamily="34" charset="0"/>
+              </a:rPr>
+              <a:t>: </a:t>
             </a:r>
             <a:r>
               <a:rPr kumimoji="0" lang="en-US" altLang="en-US" sz="1800" b="1" i="0" u="none" strike="noStrike" cap="none" normalizeH="0" baseline="0" dirty="0" err="1" smtClean="0">
@@ -18176,7 +18067,11 @@
               </a:lnSpc>
             </a:pPr>
             <a:r>
-              <a:rPr lang="en-US" dirty="0" smtClean="0"/>
+              <a:rPr lang="en-US" dirty="0" smtClean="0">
+                <a:solidFill>
+                  <a:schemeClr val="tx1"/>
+                </a:solidFill>
+              </a:rPr>
               <a:t>Python Library : </a:t>
             </a:r>
           </a:p>
@@ -18188,14 +18083,13 @@
               <a:buNone/>
             </a:pPr>
             <a:r>
-              <a:rPr lang="en-US" dirty="0" smtClean="0"/>
-              <a:t>-   Pandas for data loading and </a:t>
-            </a:r>
-            <a:r>
-              <a:rPr lang="en-US" dirty="0" smtClean="0"/>
-              <a:t>manipulation.</a:t>
-            </a:r>
-            <a:endParaRPr lang="en-US" dirty="0" smtClean="0"/>
+              <a:rPr lang="en-US" dirty="0" smtClean="0">
+                <a:solidFill>
+                  <a:schemeClr val="tx1"/>
+                </a:solidFill>
+              </a:rPr>
+              <a:t>-   Pandas for data loading and manipulation.</a:t>
+            </a:r>
           </a:p>
           <a:p>
             <a:pPr lvl="1">
@@ -18206,26 +18100,37 @@
               <a:buChar char="-"/>
             </a:pPr>
             <a:r>
-              <a:rPr lang="en-US" dirty="0" err="1" smtClean="0"/>
+              <a:rPr lang="en-US" dirty="0" err="1" smtClean="0">
+                <a:solidFill>
+                  <a:schemeClr val="tx1"/>
+                </a:solidFill>
+              </a:rPr>
               <a:t>Matplotlib</a:t>
             </a:r>
             <a:r>
-              <a:rPr lang="en-US" dirty="0" smtClean="0"/>
+              <a:rPr lang="en-US" dirty="0" smtClean="0">
+                <a:solidFill>
+                  <a:schemeClr val="tx1"/>
+                </a:solidFill>
+              </a:rPr>
               <a:t> and </a:t>
             </a:r>
             <a:r>
-              <a:rPr lang="en-US" dirty="0" err="1" smtClean="0"/>
+              <a:rPr lang="en-US" dirty="0" err="1" smtClean="0">
+                <a:solidFill>
+                  <a:schemeClr val="tx1"/>
+                </a:solidFill>
+              </a:rPr>
               <a:t>Seaborn</a:t>
             </a:r>
             <a:r>
-              <a:rPr lang="en-US" dirty="0" smtClean="0"/>
-              <a:t> for data </a:t>
-            </a:r>
-            <a:r>
-              <a:rPr lang="en-US" dirty="0" smtClean="0"/>
-              <a:t>visualization.</a:t>
-            </a:r>
-            <a:endParaRPr lang="en-US" dirty="0" smtClean="0"/>
+              <a:rPr lang="en-US" dirty="0" smtClean="0">
+                <a:solidFill>
+                  <a:schemeClr val="tx1"/>
+                </a:solidFill>
+              </a:rPr>
+              <a:t> for data visualization.</a:t>
+            </a:r>
           </a:p>
           <a:p>
             <a:pPr lvl="1">
@@ -18234,14 +18139,18 @@
               </a:lnSpc>
             </a:pPr>
             <a:r>
-              <a:rPr lang="en-US" dirty="0" smtClean="0"/>
-              <a:t>Microsoft Power Point for analysis </a:t>
-            </a:r>
-            <a:r>
-              <a:rPr lang="en-US" dirty="0" smtClean="0"/>
-              <a:t>reports and presentation.</a:t>
-            </a:r>
-            <a:endParaRPr lang="en-US" dirty="0"/>
+              <a:rPr lang="en-US" dirty="0" smtClean="0">
+                <a:solidFill>
+                  <a:schemeClr val="tx1"/>
+                </a:solidFill>
+              </a:rPr>
+              <a:t>Microsoft Power Point for analysis reports and presentation.</a:t>
+            </a:r>
+            <a:endParaRPr lang="en-US" dirty="0">
+              <a:solidFill>
+                <a:schemeClr val="tx1"/>
+              </a:solidFill>
+            </a:endParaRPr>
           </a:p>
         </p:txBody>
       </p:sp>
@@ -25385,15 +25294,6 @@
 </file>
 
 <file path=customXml/item1.xml><?xml version="1.0" encoding="utf-8"?>
-<p:properties xmlns:p="http://schemas.microsoft.com/office/2006/metadata/properties" xmlns:xsi="http://www.w3.org/2001/XMLSchema-instance" xmlns:pc="http://schemas.microsoft.com/office/infopath/2007/PartnerControls">
-  <documentManagement>
-    <Status xmlns="71af3243-3dd4-4a8d-8c0d-dd76da1f02a5">Not started</Status>
-    <MediaServiceKeyPoints xmlns="71af3243-3dd4-4a8d-8c0d-dd76da1f02a5" xsi:nil="true"/>
-  </documentManagement>
-</p:properties>
-</file>
-
-<file path=customXml/item2.xml><?xml version="1.0" encoding="utf-8"?>
 <ct:contentTypeSchema xmlns:ct="http://schemas.microsoft.com/office/2006/metadata/contentType" xmlns:ma="http://schemas.microsoft.com/office/2006/metadata/properties/metaAttributes" ct:_="" ma:_="" ma:contentTypeName="Document" ma:contentTypeID="0x01010079F111ED35F8CC479449609E8A0923A6" ma:contentTypeVersion="12" ma:contentTypeDescription="Create a new document." ma:contentTypeScope="" ma:versionID="426e97fa315356fffbdcd9876fe988c2">
   <xsd:schema xmlns:xsd="http://www.w3.org/2001/XMLSchema" xmlns:xs="http://www.w3.org/2001/XMLSchema" xmlns:p="http://schemas.microsoft.com/office/2006/metadata/properties" xmlns:ns2="71af3243-3dd4-4a8d-8c0d-dd76da1f02a5" xmlns:ns3="16c05727-aa75-4e4a-9b5f-8a80a1165891" targetNamespace="http://schemas.microsoft.com/office/2006/metadata/properties" ma:root="true" ma:fieldsID="14b8f0def80e6d70ce3def20c90759ae" ns2:_="" ns3:_="">
     <xsd:import namespace="71af3243-3dd4-4a8d-8c0d-dd76da1f02a5"/>
@@ -25614,7 +25514,7 @@
 </ct:contentTypeSchema>
 </file>
 
-<file path=customXml/item3.xml><?xml version="1.0" encoding="utf-8"?>
+<file path=customXml/item2.xml><?xml version="1.0" encoding="utf-8"?>
 <?mso-contentType ?>
 <FormTemplates xmlns="http://schemas.microsoft.com/sharepoint/v3/contenttype/forms">
   <Display>DocumentLibraryForm</Display>
@@ -25623,17 +25523,16 @@
 </FormTemplates>
 </file>
 
-<file path=customXml/itemProps1.xml><?xml version="1.0" encoding="utf-8"?>
-<ds:datastoreItem xmlns:ds="http://schemas.openxmlformats.org/officeDocument/2006/customXml" ds:itemID="{4DEA9014-ED64-4558-B1E1-D03F0EE32BEB}">
-  <ds:schemaRefs>
-    <ds:schemaRef ds:uri="http://schemas.microsoft.com/office/2006/metadata/properties"/>
-    <ds:schemaRef ds:uri="http://schemas.microsoft.com/office/infopath/2007/PartnerControls"/>
-    <ds:schemaRef ds:uri="71af3243-3dd4-4a8d-8c0d-dd76da1f02a5"/>
-  </ds:schemaRefs>
-</ds:datastoreItem>
+<file path=customXml/item3.xml><?xml version="1.0" encoding="utf-8"?>
+<p:properties xmlns:p="http://schemas.microsoft.com/office/2006/metadata/properties" xmlns:xsi="http://www.w3.org/2001/XMLSchema-instance" xmlns:pc="http://schemas.microsoft.com/office/infopath/2007/PartnerControls">
+  <documentManagement>
+    <Status xmlns="71af3243-3dd4-4a8d-8c0d-dd76da1f02a5">Not started</Status>
+    <MediaServiceKeyPoints xmlns="71af3243-3dd4-4a8d-8c0d-dd76da1f02a5" xsi:nil="true"/>
+  </documentManagement>
+</p:properties>
 </file>
 
-<file path=customXml/itemProps2.xml><?xml version="1.0" encoding="utf-8"?>
+<file path=customXml/itemProps1.xml><?xml version="1.0" encoding="utf-8"?>
 <ds:datastoreItem xmlns:ds="http://schemas.openxmlformats.org/officeDocument/2006/customXml" ds:itemID="{B19EB750-A6DA-4BE8-B87B-FC499FE73360}">
   <ds:schemaRefs>
     <ds:schemaRef ds:uri="http://schemas.microsoft.com/office/2006/metadata/contentType"/>
@@ -25652,10 +25551,20 @@
 </ds:datastoreItem>
 </file>
 
-<file path=customXml/itemProps3.xml><?xml version="1.0" encoding="utf-8"?>
+<file path=customXml/itemProps2.xml><?xml version="1.0" encoding="utf-8"?>
 <ds:datastoreItem xmlns:ds="http://schemas.openxmlformats.org/officeDocument/2006/customXml" ds:itemID="{05D99ABA-76CE-4A8E-B5F0-C051B96628DE}">
   <ds:schemaRefs>
     <ds:schemaRef ds:uri="http://schemas.microsoft.com/sharepoint/v3/contenttype/forms"/>
   </ds:schemaRefs>
 </ds:datastoreItem>
+</file>
+
+<file path=customXml/itemProps3.xml><?xml version="1.0" encoding="utf-8"?>
+<ds:datastoreItem xmlns:ds="http://schemas.openxmlformats.org/officeDocument/2006/customXml" ds:itemID="{4DEA9014-ED64-4558-B1E1-D03F0EE32BEB}">
+  <ds:schemaRefs>
+    <ds:schemaRef ds:uri="http://schemas.microsoft.com/office/2006/metadata/properties"/>
+    <ds:schemaRef ds:uri="http://schemas.microsoft.com/office/infopath/2007/PartnerControls"/>
+    <ds:schemaRef ds:uri="71af3243-3dd4-4a8d-8c0d-dd76da1f02a5"/>
+  </ds:schemaRefs>
+</ds:datastoreItem>
 </file>